--- a/docs/hackathon/idea-deck/SonarSentinel_SIH2026_Idea_DRAFT.pptx
+++ b/docs/hackathon/idea-deck/SonarSentinel_SIH2026_Idea_DRAFT.pptx
@@ -5717,7 +5717,7 @@
             </a:pPr>
             <a:r>
               <a:rPr lang="en-US" sz="1700"/>
-              <a:t>Team Name (Registered on portal)- &lt;Team Name&gt;</a:t>
+              <a:t>Team Name (Registered on portal)- Vashishta</a:t>
             </a:r>
             <a:endParaRPr lang="en-IN" sz="1700" b="1" dirty="0">
               <a:latin typeface="Arial" panose="020B0604020202020204" pitchFamily="34" charset="0"/>
@@ -6150,15 +6150,15 @@
           </a:fontRef>
         </p:style>
         <p:txBody>
-          <a:bodyPr rtlCol="0" anchor="ctr"/>
+          <a:bodyPr wrap="none" lIns="25400" rIns="25400" rtlCol="0" anchor="ctr"/>
           <a:lstStyle/>
           <a:p>
             <a:pPr algn="ctr"/>
             <a:r>
-              <a:rPr lang="en-US" dirty="0"/>
-              <a:t>Your Team Name</a:t>
-            </a:r>
-            <a:endParaRPr lang="en-IN" dirty="0"/>
+              <a:rPr lang="en-US" sz="1300"/>
+              <a:t>Vashishta</a:t>
+            </a:r>
+            <a:endParaRPr lang="en-IN" sz="1300" dirty="0"/>
           </a:p>
         </p:txBody>
       </p:sp>
@@ -6197,7 +6197,7 @@
           <p:cNvPr id="2" name="TextBox 1">
             <a:extLst>
               <a:ext uri="{FF2B5EF4-FFF2-40B4-BE49-F238E27FC236}">
-                <a16:creationId xmlns:a16="http://schemas.microsoft.com/office/drawing/2014/main" id="{04FE02F4-46A0-07B7-E365-8F286E81CD90}"/>
+                <a16:creationId xmlns:a16="http://schemas.microsoft.com/office/drawing/2014/main" id="{B02C2989-5906-D6AF-B4A1-8D9E478D2FC4}"/>
               </a:ext>
             </a:extLst>
           </p:cNvPr>
@@ -6458,7 +6458,7 @@
           <p:cNvPr id="3" name="Rectangle: Rounded Corners 2">
             <a:extLst>
               <a:ext uri="{FF2B5EF4-FFF2-40B4-BE49-F238E27FC236}">
-                <a16:creationId xmlns:a16="http://schemas.microsoft.com/office/drawing/2014/main" id="{B43194AC-B998-CAC3-5C5C-DC1F9D380343}"/>
+                <a16:creationId xmlns:a16="http://schemas.microsoft.com/office/drawing/2014/main" id="{A53B6A47-C5F4-B914-E1C3-02C214D48C2C}"/>
               </a:ext>
             </a:extLst>
           </p:cNvPr>
@@ -6510,7 +6510,7 @@
           <p:cNvPr id="4" name="TextBox 3">
             <a:extLst>
               <a:ext uri="{FF2B5EF4-FFF2-40B4-BE49-F238E27FC236}">
-                <a16:creationId xmlns:a16="http://schemas.microsoft.com/office/drawing/2014/main" id="{CE321146-9037-1510-82D2-E4C913651BC8}"/>
+                <a16:creationId xmlns:a16="http://schemas.microsoft.com/office/drawing/2014/main" id="{E806FFA9-F444-E05E-2429-98C92BD69AD7}"/>
               </a:ext>
             </a:extLst>
           </p:cNvPr>
@@ -6683,7 +6683,7 @@
           <p:cNvPr id="5" name="Rectangle: Rounded Corners 4">
             <a:extLst>
               <a:ext uri="{FF2B5EF4-FFF2-40B4-BE49-F238E27FC236}">
-                <a16:creationId xmlns:a16="http://schemas.microsoft.com/office/drawing/2014/main" id="{7BFC6D52-46CE-5AE6-52B9-7AF5C420C055}"/>
+                <a16:creationId xmlns:a16="http://schemas.microsoft.com/office/drawing/2014/main" id="{08AAD762-3510-76C1-676C-F15EF090034C}"/>
               </a:ext>
             </a:extLst>
           </p:cNvPr>
@@ -7082,15 +7082,15 @@
           </a:fontRef>
         </p:style>
         <p:txBody>
-          <a:bodyPr rtlCol="0" anchor="ctr"/>
+          <a:bodyPr wrap="none" lIns="25400" rIns="25400" rtlCol="0" anchor="ctr"/>
           <a:lstStyle/>
           <a:p>
             <a:pPr algn="ctr"/>
             <a:r>
-              <a:rPr lang="en-US" dirty="0"/>
-              <a:t>Your Team Name</a:t>
-            </a:r>
-            <a:endParaRPr lang="en-IN" dirty="0"/>
+              <a:rPr lang="en-US" sz="1300"/>
+              <a:t>Vashishta</a:t>
+            </a:r>
+            <a:endParaRPr lang="en-IN" sz="1300" dirty="0"/>
           </a:p>
         </p:txBody>
       </p:sp>
@@ -7129,7 +7129,7 @@
           <p:cNvPr id="2" name="Table 1">
             <a:extLst>
               <a:ext uri="{FF2B5EF4-FFF2-40B4-BE49-F238E27FC236}">
-                <a16:creationId xmlns:a16="http://schemas.microsoft.com/office/drawing/2014/main" id="{721B2CDD-D700-CDE5-9744-C53FB71C1DB8}"/>
+                <a16:creationId xmlns:a16="http://schemas.microsoft.com/office/drawing/2014/main" id="{749CBC1B-180E-B149-3AB0-8FECAFF9ECA0}"/>
               </a:ext>
             </a:extLst>
           </p:cNvPr>
@@ -7139,7 +7139,7 @@
           <p:nvPr>
             <p:extLst>
               <p:ext uri="{D42A27DB-BD31-4B8C-83A1-F6EECF244321}">
-                <p14:modId xmlns:p14="http://schemas.microsoft.com/office/powerpoint/2010/main" val="740267059"/>
+                <p14:modId xmlns:p14="http://schemas.microsoft.com/office/powerpoint/2010/main" val="791693733"/>
               </p:ext>
             </p:extLst>
           </p:nvPr>
@@ -7158,14 +7158,14 @@
                 <a:gridCol w="2159000">
                   <a:extLst>
                     <a:ext uri="{9D8B030D-6E8A-4147-A177-3AD203B41FA5}">
-                      <a16:colId xmlns:a16="http://schemas.microsoft.com/office/drawing/2014/main" val="1548154976"/>
+                      <a16:colId xmlns:a16="http://schemas.microsoft.com/office/drawing/2014/main" val="3281345459"/>
                     </a:ext>
                   </a:extLst>
                 </a:gridCol>
                 <a:gridCol w="9017000">
                   <a:extLst>
                     <a:ext uri="{9D8B030D-6E8A-4147-A177-3AD203B41FA5}">
-                      <a16:colId xmlns:a16="http://schemas.microsoft.com/office/drawing/2014/main" val="336626519"/>
+                      <a16:colId xmlns:a16="http://schemas.microsoft.com/office/drawing/2014/main" val="242274928"/>
                     </a:ext>
                   </a:extLst>
                 </a:gridCol>
@@ -7199,7 +7199,7 @@
                 </a:tc>
                 <a:extLst>
                   <a:ext uri="{0D108BD9-81ED-4DB2-BD59-A6C34878D82A}">
-                    <a16:rowId xmlns:a16="http://schemas.microsoft.com/office/drawing/2014/main" val="3017224431"/>
+                    <a16:rowId xmlns:a16="http://schemas.microsoft.com/office/drawing/2014/main" val="2582042158"/>
                   </a:ext>
                 </a:extLst>
               </a:tr>
@@ -7232,7 +7232,7 @@
                 </a:tc>
                 <a:extLst>
                   <a:ext uri="{0D108BD9-81ED-4DB2-BD59-A6C34878D82A}">
-                    <a16:rowId xmlns:a16="http://schemas.microsoft.com/office/drawing/2014/main" val="3739641747"/>
+                    <a16:rowId xmlns:a16="http://schemas.microsoft.com/office/drawing/2014/main" val="267640221"/>
                   </a:ext>
                 </a:extLst>
               </a:tr>
@@ -7266,7 +7266,7 @@
                 </a:tc>
                 <a:extLst>
                   <a:ext uri="{0D108BD9-81ED-4DB2-BD59-A6C34878D82A}">
-                    <a16:rowId xmlns:a16="http://schemas.microsoft.com/office/drawing/2014/main" val="4063912427"/>
+                    <a16:rowId xmlns:a16="http://schemas.microsoft.com/office/drawing/2014/main" val="1336790835"/>
                   </a:ext>
                 </a:extLst>
               </a:tr>
@@ -7299,7 +7299,7 @@
                 </a:tc>
                 <a:extLst>
                   <a:ext uri="{0D108BD9-81ED-4DB2-BD59-A6C34878D82A}">
-                    <a16:rowId xmlns:a16="http://schemas.microsoft.com/office/drawing/2014/main" val="2164003273"/>
+                    <a16:rowId xmlns:a16="http://schemas.microsoft.com/office/drawing/2014/main" val="3507984981"/>
                   </a:ext>
                 </a:extLst>
               </a:tr>
@@ -7332,7 +7332,7 @@
                 </a:tc>
                 <a:extLst>
                   <a:ext uri="{0D108BD9-81ED-4DB2-BD59-A6C34878D82A}">
-                    <a16:rowId xmlns:a16="http://schemas.microsoft.com/office/drawing/2014/main" val="1119835951"/>
+                    <a16:rowId xmlns:a16="http://schemas.microsoft.com/office/drawing/2014/main" val="2015204842"/>
                   </a:ext>
                 </a:extLst>
               </a:tr>
@@ -7365,7 +7365,7 @@
                 </a:tc>
                 <a:extLst>
                   <a:ext uri="{0D108BD9-81ED-4DB2-BD59-A6C34878D82A}">
-                    <a16:rowId xmlns:a16="http://schemas.microsoft.com/office/drawing/2014/main" val="3892052170"/>
+                    <a16:rowId xmlns:a16="http://schemas.microsoft.com/office/drawing/2014/main" val="4093995938"/>
                   </a:ext>
                 </a:extLst>
               </a:tr>
@@ -7378,7 +7378,7 @@
           <p:cNvPr id="3" name="TextBox 2">
             <a:extLst>
               <a:ext uri="{FF2B5EF4-FFF2-40B4-BE49-F238E27FC236}">
-                <a16:creationId xmlns:a16="http://schemas.microsoft.com/office/drawing/2014/main" id="{3033C43E-9AEA-84F5-730F-65329F74059D}"/>
+                <a16:creationId xmlns:a16="http://schemas.microsoft.com/office/drawing/2014/main" id="{90FDC309-FE72-3998-A2BB-370FE068B277}"/>
               </a:ext>
             </a:extLst>
           </p:cNvPr>
@@ -7430,7 +7430,7 @@
           <p:cNvPr id="4" name="Rectangle: Rounded Corners 3">
             <a:extLst>
               <a:ext uri="{FF2B5EF4-FFF2-40B4-BE49-F238E27FC236}">
-                <a16:creationId xmlns:a16="http://schemas.microsoft.com/office/drawing/2014/main" id="{F0A0F8F4-82F5-C1DE-14BC-95E0B51EF337}"/>
+                <a16:creationId xmlns:a16="http://schemas.microsoft.com/office/drawing/2014/main" id="{CBACE06F-0DE1-03E7-74C1-A86666F8A2BD}"/>
               </a:ext>
             </a:extLst>
           </p:cNvPr>
@@ -7538,7 +7538,7 @@
           <p:cNvPr id="5" name="Arrow: Right 4">
             <a:extLst>
               <a:ext uri="{FF2B5EF4-FFF2-40B4-BE49-F238E27FC236}">
-                <a16:creationId xmlns:a16="http://schemas.microsoft.com/office/drawing/2014/main" id="{62AA71BB-B744-74D0-2C45-A7D668BA1D24}"/>
+                <a16:creationId xmlns:a16="http://schemas.microsoft.com/office/drawing/2014/main" id="{C71060ED-7DAF-BACB-4618-CCAC5F8D38C9}"/>
               </a:ext>
             </a:extLst>
           </p:cNvPr>
@@ -7622,7 +7622,7 @@
           <p:cNvPr id="8" name="Rectangle: Rounded Corners 7">
             <a:extLst>
               <a:ext uri="{FF2B5EF4-FFF2-40B4-BE49-F238E27FC236}">
-                <a16:creationId xmlns:a16="http://schemas.microsoft.com/office/drawing/2014/main" id="{369B8B6D-4649-EBE2-2816-12F973138517}"/>
+                <a16:creationId xmlns:a16="http://schemas.microsoft.com/office/drawing/2014/main" id="{26B9E681-F323-4219-DBD5-93F1DDA0536B}"/>
               </a:ext>
             </a:extLst>
           </p:cNvPr>
@@ -7730,7 +7730,7 @@
           <p:cNvPr id="9" name="Arrow: Right 8">
             <a:extLst>
               <a:ext uri="{FF2B5EF4-FFF2-40B4-BE49-F238E27FC236}">
-                <a16:creationId xmlns:a16="http://schemas.microsoft.com/office/drawing/2014/main" id="{271614E7-6F3A-D38C-8BE6-571629732056}"/>
+                <a16:creationId xmlns:a16="http://schemas.microsoft.com/office/drawing/2014/main" id="{8A7E73A7-358C-5E16-551E-3603679A5125}"/>
               </a:ext>
             </a:extLst>
           </p:cNvPr>
@@ -7814,7 +7814,7 @@
           <p:cNvPr id="13" name="Rectangle: Rounded Corners 12">
             <a:extLst>
               <a:ext uri="{FF2B5EF4-FFF2-40B4-BE49-F238E27FC236}">
-                <a16:creationId xmlns:a16="http://schemas.microsoft.com/office/drawing/2014/main" id="{7AFAD804-64C5-594C-43A7-2D09F8C70BF6}"/>
+                <a16:creationId xmlns:a16="http://schemas.microsoft.com/office/drawing/2014/main" id="{D6C137D1-FAB6-899F-8975-2ADD9069466B}"/>
               </a:ext>
             </a:extLst>
           </p:cNvPr>
@@ -7917,7 +7917,7 @@
           <p:cNvPr id="14" name="Arrow: Right 13">
             <a:extLst>
               <a:ext uri="{FF2B5EF4-FFF2-40B4-BE49-F238E27FC236}">
-                <a16:creationId xmlns:a16="http://schemas.microsoft.com/office/drawing/2014/main" id="{24EF77CD-B303-B9C0-A997-5F1A50868DA4}"/>
+                <a16:creationId xmlns:a16="http://schemas.microsoft.com/office/drawing/2014/main" id="{CD4B0004-3D69-B116-D304-B557D9DF0767}"/>
               </a:ext>
             </a:extLst>
           </p:cNvPr>
@@ -8001,7 +8001,7 @@
           <p:cNvPr id="15" name="Rectangle: Rounded Corners 14">
             <a:extLst>
               <a:ext uri="{FF2B5EF4-FFF2-40B4-BE49-F238E27FC236}">
-                <a16:creationId xmlns:a16="http://schemas.microsoft.com/office/drawing/2014/main" id="{FFA02C6A-3B4A-0D85-5A6B-51B8ABE2ECBD}"/>
+                <a16:creationId xmlns:a16="http://schemas.microsoft.com/office/drawing/2014/main" id="{76B8A814-16D3-1737-1481-68FE787E1AA9}"/>
               </a:ext>
             </a:extLst>
           </p:cNvPr>
@@ -8104,7 +8104,7 @@
           <p:cNvPr id="16" name="Arrow: Right 15">
             <a:extLst>
               <a:ext uri="{FF2B5EF4-FFF2-40B4-BE49-F238E27FC236}">
-                <a16:creationId xmlns:a16="http://schemas.microsoft.com/office/drawing/2014/main" id="{29DEE70E-17AA-8B97-A66F-8A22E6334D38}"/>
+                <a16:creationId xmlns:a16="http://schemas.microsoft.com/office/drawing/2014/main" id="{D25EBC57-AEEA-EE26-ABAE-71F661B422FD}"/>
               </a:ext>
             </a:extLst>
           </p:cNvPr>
@@ -8188,7 +8188,7 @@
           <p:cNvPr id="17" name="Rectangle: Rounded Corners 16">
             <a:extLst>
               <a:ext uri="{FF2B5EF4-FFF2-40B4-BE49-F238E27FC236}">
-                <a16:creationId xmlns:a16="http://schemas.microsoft.com/office/drawing/2014/main" id="{0074301E-E7E5-EEFB-23A5-1A16906C6271}"/>
+                <a16:creationId xmlns:a16="http://schemas.microsoft.com/office/drawing/2014/main" id="{B87F05E8-AD75-A44C-A9D9-AA9AD360F914}"/>
               </a:ext>
             </a:extLst>
           </p:cNvPr>
@@ -8296,7 +8296,7 @@
           <p:cNvPr id="18" name="Arrow: Right 17">
             <a:extLst>
               <a:ext uri="{FF2B5EF4-FFF2-40B4-BE49-F238E27FC236}">
-                <a16:creationId xmlns:a16="http://schemas.microsoft.com/office/drawing/2014/main" id="{C21AEE86-8246-3DDF-A7E1-258061CA0306}"/>
+                <a16:creationId xmlns:a16="http://schemas.microsoft.com/office/drawing/2014/main" id="{C3164907-A370-6601-5D4D-B97CBA8C4F6D}"/>
               </a:ext>
             </a:extLst>
           </p:cNvPr>
@@ -8380,7 +8380,7 @@
           <p:cNvPr id="19" name="Rectangle: Rounded Corners 18">
             <a:extLst>
               <a:ext uri="{FF2B5EF4-FFF2-40B4-BE49-F238E27FC236}">
-                <a16:creationId xmlns:a16="http://schemas.microsoft.com/office/drawing/2014/main" id="{B9F720E8-0316-E69D-53CC-722134204F00}"/>
+                <a16:creationId xmlns:a16="http://schemas.microsoft.com/office/drawing/2014/main" id="{CD9E9F79-CFC2-B58E-7CA9-5BC05DDBA02F}"/>
               </a:ext>
             </a:extLst>
           </p:cNvPr>
@@ -8483,7 +8483,7 @@
           <p:cNvPr id="20" name="TextBox 19">
             <a:extLst>
               <a:ext uri="{FF2B5EF4-FFF2-40B4-BE49-F238E27FC236}">
-                <a16:creationId xmlns:a16="http://schemas.microsoft.com/office/drawing/2014/main" id="{7BC6D0D6-524B-5610-2CE8-91ABC07A1D81}"/>
+                <a16:creationId xmlns:a16="http://schemas.microsoft.com/office/drawing/2014/main" id="{5A626426-132C-C8A8-CC65-02B577DDAC9B}"/>
               </a:ext>
             </a:extLst>
           </p:cNvPr>
@@ -9037,15 +9037,15 @@
           </a:fontRef>
         </p:style>
         <p:txBody>
-          <a:bodyPr rtlCol="0" anchor="ctr"/>
+          <a:bodyPr wrap="none" lIns="25400" rIns="25400" rtlCol="0" anchor="ctr"/>
           <a:lstStyle/>
           <a:p>
             <a:pPr algn="ctr"/>
             <a:r>
-              <a:rPr lang="en-US" dirty="0"/>
-              <a:t>Your Team Name</a:t>
-            </a:r>
-            <a:endParaRPr lang="en-IN" dirty="0"/>
+              <a:rPr lang="en-US" sz="1300"/>
+              <a:t>Vashishta</a:t>
+            </a:r>
+            <a:endParaRPr lang="en-IN" sz="1300" dirty="0"/>
           </a:p>
         </p:txBody>
       </p:sp>
@@ -9084,7 +9084,7 @@
           <p:cNvPr id="2" name="TextBox 1">
             <a:extLst>
               <a:ext uri="{FF2B5EF4-FFF2-40B4-BE49-F238E27FC236}">
-                <a16:creationId xmlns:a16="http://schemas.microsoft.com/office/drawing/2014/main" id="{77BEE4DF-B45F-9A9B-0088-C61A8AB282CB}"/>
+                <a16:creationId xmlns:a16="http://schemas.microsoft.com/office/drawing/2014/main" id="{D1FC2CF8-8089-27D8-1DF3-1F9A9E786A44}"/>
               </a:ext>
             </a:extLst>
           </p:cNvPr>
@@ -9191,7 +9191,7 @@
           <p:cNvPr id="3" name="Table 2">
             <a:extLst>
               <a:ext uri="{FF2B5EF4-FFF2-40B4-BE49-F238E27FC236}">
-                <a16:creationId xmlns:a16="http://schemas.microsoft.com/office/drawing/2014/main" id="{8C42D341-E627-2237-6128-929FD2959058}"/>
+                <a16:creationId xmlns:a16="http://schemas.microsoft.com/office/drawing/2014/main" id="{806007D0-F9CF-3714-B427-FD26221D6B41}"/>
               </a:ext>
             </a:extLst>
           </p:cNvPr>
@@ -9201,7 +9201,7 @@
           <p:nvPr>
             <p:extLst>
               <p:ext uri="{D42A27DB-BD31-4B8C-83A1-F6EECF244321}">
-                <p14:modId xmlns:p14="http://schemas.microsoft.com/office/powerpoint/2010/main" val="1474441977"/>
+                <p14:modId xmlns:p14="http://schemas.microsoft.com/office/powerpoint/2010/main" val="1948187453"/>
               </p:ext>
             </p:extLst>
           </p:nvPr>
@@ -9220,14 +9220,14 @@
                 <a:gridCol w="3810000">
                   <a:extLst>
                     <a:ext uri="{9D8B030D-6E8A-4147-A177-3AD203B41FA5}">
-                      <a16:colId xmlns:a16="http://schemas.microsoft.com/office/drawing/2014/main" val="3362589652"/>
+                      <a16:colId xmlns:a16="http://schemas.microsoft.com/office/drawing/2014/main" val="1758079260"/>
                     </a:ext>
                   </a:extLst>
                 </a:gridCol>
                 <a:gridCol w="7366000">
                   <a:extLst>
                     <a:ext uri="{9D8B030D-6E8A-4147-A177-3AD203B41FA5}">
-                      <a16:colId xmlns:a16="http://schemas.microsoft.com/office/drawing/2014/main" val="1951833905"/>
+                      <a16:colId xmlns:a16="http://schemas.microsoft.com/office/drawing/2014/main" val="184081857"/>
                     </a:ext>
                   </a:extLst>
                 </a:gridCol>
@@ -9261,7 +9261,7 @@
                 </a:tc>
                 <a:extLst>
                   <a:ext uri="{0D108BD9-81ED-4DB2-BD59-A6C34878D82A}">
-                    <a16:rowId xmlns:a16="http://schemas.microsoft.com/office/drawing/2014/main" val="3130263068"/>
+                    <a16:rowId xmlns:a16="http://schemas.microsoft.com/office/drawing/2014/main" val="1964656261"/>
                   </a:ext>
                 </a:extLst>
               </a:tr>
@@ -9295,7 +9295,7 @@
                 </a:tc>
                 <a:extLst>
                   <a:ext uri="{0D108BD9-81ED-4DB2-BD59-A6C34878D82A}">
-                    <a16:rowId xmlns:a16="http://schemas.microsoft.com/office/drawing/2014/main" val="1666587537"/>
+                    <a16:rowId xmlns:a16="http://schemas.microsoft.com/office/drawing/2014/main" val="3300502440"/>
                   </a:ext>
                 </a:extLst>
               </a:tr>
@@ -9330,7 +9330,7 @@
                 </a:tc>
                 <a:extLst>
                   <a:ext uri="{0D108BD9-81ED-4DB2-BD59-A6C34878D82A}">
-                    <a16:rowId xmlns:a16="http://schemas.microsoft.com/office/drawing/2014/main" val="1252668136"/>
+                    <a16:rowId xmlns:a16="http://schemas.microsoft.com/office/drawing/2014/main" val="2634564264"/>
                   </a:ext>
                 </a:extLst>
               </a:tr>
@@ -9365,7 +9365,7 @@
                 </a:tc>
                 <a:extLst>
                   <a:ext uri="{0D108BD9-81ED-4DB2-BD59-A6C34878D82A}">
-                    <a16:rowId xmlns:a16="http://schemas.microsoft.com/office/drawing/2014/main" val="1147677207"/>
+                    <a16:rowId xmlns:a16="http://schemas.microsoft.com/office/drawing/2014/main" val="663761460"/>
                   </a:ext>
                 </a:extLst>
               </a:tr>
@@ -9400,7 +9400,7 @@
                 </a:tc>
                 <a:extLst>
                   <a:ext uri="{0D108BD9-81ED-4DB2-BD59-A6C34878D82A}">
-                    <a16:rowId xmlns:a16="http://schemas.microsoft.com/office/drawing/2014/main" val="68056934"/>
+                    <a16:rowId xmlns:a16="http://schemas.microsoft.com/office/drawing/2014/main" val="238638359"/>
                   </a:ext>
                 </a:extLst>
               </a:tr>
@@ -9435,7 +9435,7 @@
                 </a:tc>
                 <a:extLst>
                   <a:ext uri="{0D108BD9-81ED-4DB2-BD59-A6C34878D82A}">
-                    <a16:rowId xmlns:a16="http://schemas.microsoft.com/office/drawing/2014/main" val="3867454832"/>
+                    <a16:rowId xmlns:a16="http://schemas.microsoft.com/office/drawing/2014/main" val="2985389041"/>
                   </a:ext>
                 </a:extLst>
               </a:tr>
@@ -9862,15 +9862,15 @@
           </a:fontRef>
         </p:style>
         <p:txBody>
-          <a:bodyPr rtlCol="0" anchor="ctr"/>
+          <a:bodyPr wrap="none" lIns="25400" rIns="25400" rtlCol="0" anchor="ctr"/>
           <a:lstStyle/>
           <a:p>
             <a:pPr algn="ctr"/>
             <a:r>
-              <a:rPr lang="en-US" dirty="0"/>
-              <a:t>Your Team Name</a:t>
-            </a:r>
-            <a:endParaRPr lang="en-IN" dirty="0"/>
+              <a:rPr lang="en-US" sz="1300"/>
+              <a:t>Vashishta</a:t>
+            </a:r>
+            <a:endParaRPr lang="en-IN" sz="1300" dirty="0"/>
           </a:p>
         </p:txBody>
       </p:sp>
@@ -9909,7 +9909,7 @@
           <p:cNvPr id="2" name="TextBox 1">
             <a:extLst>
               <a:ext uri="{FF2B5EF4-FFF2-40B4-BE49-F238E27FC236}">
-                <a16:creationId xmlns:a16="http://schemas.microsoft.com/office/drawing/2014/main" id="{872DDDF7-0FDA-4B09-D607-BEAD282D7173}"/>
+                <a16:creationId xmlns:a16="http://schemas.microsoft.com/office/drawing/2014/main" id="{D7E45BDD-5746-426B-10B2-E85CA066CA6E}"/>
               </a:ext>
             </a:extLst>
           </p:cNvPr>
@@ -10016,7 +10016,7 @@
           <p:cNvPr id="3" name="Table 2">
             <a:extLst>
               <a:ext uri="{FF2B5EF4-FFF2-40B4-BE49-F238E27FC236}">
-                <a16:creationId xmlns:a16="http://schemas.microsoft.com/office/drawing/2014/main" id="{DF5F9975-330F-84A8-A97D-4C3B204A08C9}"/>
+                <a16:creationId xmlns:a16="http://schemas.microsoft.com/office/drawing/2014/main" id="{FEE1C92F-4456-A30D-0296-9143B14AB8B5}"/>
               </a:ext>
             </a:extLst>
           </p:cNvPr>
@@ -10026,7 +10026,7 @@
           <p:nvPr>
             <p:extLst>
               <p:ext uri="{D42A27DB-BD31-4B8C-83A1-F6EECF244321}">
-                <p14:modId xmlns:p14="http://schemas.microsoft.com/office/powerpoint/2010/main" val="3910283995"/>
+                <p14:modId xmlns:p14="http://schemas.microsoft.com/office/powerpoint/2010/main" val="3645906404"/>
               </p:ext>
             </p:extLst>
           </p:nvPr>
@@ -10045,14 +10045,14 @@
                 <a:gridCol w="2413000">
                   <a:extLst>
                     <a:ext uri="{9D8B030D-6E8A-4147-A177-3AD203B41FA5}">
-                      <a16:colId xmlns:a16="http://schemas.microsoft.com/office/drawing/2014/main" val="2256715135"/>
+                      <a16:colId xmlns:a16="http://schemas.microsoft.com/office/drawing/2014/main" val="2800710774"/>
                     </a:ext>
                   </a:extLst>
                 </a:gridCol>
                 <a:gridCol w="8763000">
                   <a:extLst>
                     <a:ext uri="{9D8B030D-6E8A-4147-A177-3AD203B41FA5}">
-                      <a16:colId xmlns:a16="http://schemas.microsoft.com/office/drawing/2014/main" val="3447672629"/>
+                      <a16:colId xmlns:a16="http://schemas.microsoft.com/office/drawing/2014/main" val="1411671382"/>
                     </a:ext>
                   </a:extLst>
                 </a:gridCol>
@@ -10086,7 +10086,7 @@
                 </a:tc>
                 <a:extLst>
                   <a:ext uri="{0D108BD9-81ED-4DB2-BD59-A6C34878D82A}">
-                    <a16:rowId xmlns:a16="http://schemas.microsoft.com/office/drawing/2014/main" val="3654340004"/>
+                    <a16:rowId xmlns:a16="http://schemas.microsoft.com/office/drawing/2014/main" val="2498739666"/>
                   </a:ext>
                 </a:extLst>
               </a:tr>
@@ -10120,7 +10120,7 @@
                 </a:tc>
                 <a:extLst>
                   <a:ext uri="{0D108BD9-81ED-4DB2-BD59-A6C34878D82A}">
-                    <a16:rowId xmlns:a16="http://schemas.microsoft.com/office/drawing/2014/main" val="727266397"/>
+                    <a16:rowId xmlns:a16="http://schemas.microsoft.com/office/drawing/2014/main" val="1437735975"/>
                   </a:ext>
                 </a:extLst>
               </a:tr>
@@ -10154,7 +10154,7 @@
                 </a:tc>
                 <a:extLst>
                   <a:ext uri="{0D108BD9-81ED-4DB2-BD59-A6C34878D82A}">
-                    <a16:rowId xmlns:a16="http://schemas.microsoft.com/office/drawing/2014/main" val="2785272851"/>
+                    <a16:rowId xmlns:a16="http://schemas.microsoft.com/office/drawing/2014/main" val="4257457955"/>
                   </a:ext>
                 </a:extLst>
               </a:tr>
@@ -10188,7 +10188,7 @@
                 </a:tc>
                 <a:extLst>
                   <a:ext uri="{0D108BD9-81ED-4DB2-BD59-A6C34878D82A}">
-                    <a16:rowId xmlns:a16="http://schemas.microsoft.com/office/drawing/2014/main" val="604755859"/>
+                    <a16:rowId xmlns:a16="http://schemas.microsoft.com/office/drawing/2014/main" val="2915903819"/>
                   </a:ext>
                 </a:extLst>
               </a:tr>
@@ -10222,7 +10222,7 @@
                 </a:tc>
                 <a:extLst>
                   <a:ext uri="{0D108BD9-81ED-4DB2-BD59-A6C34878D82A}">
-                    <a16:rowId xmlns:a16="http://schemas.microsoft.com/office/drawing/2014/main" val="1368064411"/>
+                    <a16:rowId xmlns:a16="http://schemas.microsoft.com/office/drawing/2014/main" val="946755425"/>
                   </a:ext>
                 </a:extLst>
               </a:tr>
@@ -10256,7 +10256,7 @@
                 </a:tc>
                 <a:extLst>
                   <a:ext uri="{0D108BD9-81ED-4DB2-BD59-A6C34878D82A}">
-                    <a16:rowId xmlns:a16="http://schemas.microsoft.com/office/drawing/2014/main" val="2839265844"/>
+                    <a16:rowId xmlns:a16="http://schemas.microsoft.com/office/drawing/2014/main" val="3909319828"/>
                   </a:ext>
                 </a:extLst>
               </a:tr>
@@ -10664,15 +10664,15 @@
           </a:fontRef>
         </p:style>
         <p:txBody>
-          <a:bodyPr rtlCol="0" anchor="ctr"/>
+          <a:bodyPr wrap="none" lIns="25400" rIns="25400" rtlCol="0" anchor="ctr"/>
           <a:lstStyle/>
           <a:p>
             <a:pPr algn="ctr"/>
             <a:r>
-              <a:rPr lang="en-US" dirty="0"/>
-              <a:t>Your Team Name</a:t>
-            </a:r>
-            <a:endParaRPr lang="en-IN" dirty="0"/>
+              <a:rPr lang="en-US" sz="1300"/>
+              <a:t>Vashishta</a:t>
+            </a:r>
+            <a:endParaRPr lang="en-IN" sz="1300" dirty="0"/>
           </a:p>
         </p:txBody>
       </p:sp>
@@ -10711,7 +10711,7 @@
           <p:cNvPr id="2" name="TextBox 1">
             <a:extLst>
               <a:ext uri="{FF2B5EF4-FFF2-40B4-BE49-F238E27FC236}">
-                <a16:creationId xmlns:a16="http://schemas.microsoft.com/office/drawing/2014/main" id="{6672BA9C-44DE-F8D1-4423-FD24666E1C89}"/>
+                <a16:creationId xmlns:a16="http://schemas.microsoft.com/office/drawing/2014/main" id="{86B62AA4-8ADC-A0DD-8A45-BD8165A19F85}"/>
               </a:ext>
             </a:extLst>
           </p:cNvPr>
